--- a/Module 2 topic 2/t2-lesson1-transforming-linear-functions.pptx
+++ b/Module 2 topic 2/t2-lesson1-transforming-linear-functions.pptx
@@ -2620,6 +2620,40 @@
           </a:p>
         </p:txBody>
       </p:sp>
+      <p:sp>
+        <p:nvSpPr>
+          <p:cNvPr id="8" name="Slide Number 8"/>
+          <p:cNvSpPr txBox="1"/>
+          <p:nvPr/>
+        </p:nvSpPr>
+        <p:spPr>
+          <a:xfrm>
+            <a:off x="11277295" y="6611112"/>
+            <a:ext cx="685800" cy="201168"/>
+          </a:xfrm>
+          <a:prstGeom prst="rect">
+            <a:avLst/>
+          </a:prstGeom>
+          <a:noFill/>
+        </p:spPr>
+        <p:txBody>
+          <a:bodyPr wrap="none" lIns="0" tIns="0" rIns="0" bIns="0" anchor="b">
+            <a:noAutofit/>
+          </a:bodyPr>
+          <a:lstStyle/>
+          <a:p>
+            <a:pPr algn="r"/>
+            <a:fld id="{5C1A6E0B-3B1F-4D5E-9C7A-2F4B8D6E1A90}" type="slidenum">
+              <a:rPr lang="en-US" sz="1200" dirty="0">
+                <a:solidFill>
+                  <a:srgbClr val="5F6272"/>
+                </a:solidFill>
+              </a:rPr>
+              <a:t>1</a:t>
+            </a:fld>
+          </a:p>
+        </p:txBody>
+      </p:sp>
     </p:spTree>
   </p:cSld>
   <p:clrMapOvr>
@@ -3005,6 +3039,40 @@
               <a:t xml:space="preserve">.</a:t>
             </a:r>
             <a:endParaRPr lang="en-US" sz="1950" dirty="0"/>
+          </a:p>
+        </p:txBody>
+      </p:sp>
+      <p:sp>
+        <p:nvSpPr>
+          <p:cNvPr id="7" name="Slide Number 7"/>
+          <p:cNvSpPr txBox="1"/>
+          <p:nvPr/>
+        </p:nvSpPr>
+        <p:spPr>
+          <a:xfrm>
+            <a:off x="11277295" y="6611112"/>
+            <a:ext cx="685800" cy="201168"/>
+          </a:xfrm>
+          <a:prstGeom prst="rect">
+            <a:avLst/>
+          </a:prstGeom>
+          <a:noFill/>
+        </p:spPr>
+        <p:txBody>
+          <a:bodyPr wrap="none" lIns="0" tIns="0" rIns="0" bIns="0" anchor="b">
+            <a:noAutofit/>
+          </a:bodyPr>
+          <a:lstStyle/>
+          <a:p>
+            <a:pPr algn="r"/>
+            <a:fld id="{5C1A6E0B-3B1F-4D5E-9C7A-2F4B8D6E1A90}" type="slidenum">
+              <a:rPr lang="en-US" sz="1200" dirty="0">
+                <a:solidFill>
+                  <a:srgbClr val="5F6272"/>
+                </a:solidFill>
+              </a:rPr>
+              <a:t>10</a:t>
+            </a:fld>
           </a:p>
         </p:txBody>
       </p:sp>
@@ -3495,6 +3563,40 @@
           </a:p>
         </p:txBody>
       </p:sp>
+      <p:sp>
+        <p:nvSpPr>
+          <p:cNvPr id="5" name="Slide Number 5"/>
+          <p:cNvSpPr txBox="1"/>
+          <p:nvPr/>
+        </p:nvSpPr>
+        <p:spPr>
+          <a:xfrm>
+            <a:off x="11277295" y="6611112"/>
+            <a:ext cx="685800" cy="201168"/>
+          </a:xfrm>
+          <a:prstGeom prst="rect">
+            <a:avLst/>
+          </a:prstGeom>
+          <a:noFill/>
+        </p:spPr>
+        <p:txBody>
+          <a:bodyPr wrap="none" lIns="0" tIns="0" rIns="0" bIns="0" anchor="b">
+            <a:noAutofit/>
+          </a:bodyPr>
+          <a:lstStyle/>
+          <a:p>
+            <a:pPr algn="r"/>
+            <a:fld id="{5C1A6E0B-3B1F-4D5E-9C7A-2F4B8D6E1A90}" type="slidenum">
+              <a:rPr lang="en-US" sz="1200" dirty="0">
+                <a:solidFill>
+                  <a:srgbClr val="5F6272"/>
+                </a:solidFill>
+              </a:rPr>
+              <a:t>11</a:t>
+            </a:fld>
+          </a:p>
+        </p:txBody>
+      </p:sp>
     </p:spTree>
   </p:cSld>
   <p:clrMapOvr>
@@ -4655,6 +4757,40 @@
               <a:t xml:space="preserve">(0, 5)</a:t>
             </a:r>
             <a:endParaRPr lang="en-US" sz="2325" dirty="0"/>
+          </a:p>
+        </p:txBody>
+      </p:sp>
+      <p:sp>
+        <p:nvSpPr>
+          <p:cNvPr id="12" name="Slide Number 12"/>
+          <p:cNvSpPr txBox="1"/>
+          <p:nvPr/>
+        </p:nvSpPr>
+        <p:spPr>
+          <a:xfrm>
+            <a:off x="11277295" y="6611112"/>
+            <a:ext cx="685800" cy="201168"/>
+          </a:xfrm>
+          <a:prstGeom prst="rect">
+            <a:avLst/>
+          </a:prstGeom>
+          <a:noFill/>
+        </p:spPr>
+        <p:txBody>
+          <a:bodyPr wrap="none" lIns="0" tIns="0" rIns="0" bIns="0" anchor="b">
+            <a:noAutofit/>
+          </a:bodyPr>
+          <a:lstStyle/>
+          <a:p>
+            <a:pPr algn="r"/>
+            <a:fld id="{5C1A6E0B-3B1F-4D5E-9C7A-2F4B8D6E1A90}" type="slidenum">
+              <a:rPr lang="en-US" sz="1200" dirty="0">
+                <a:solidFill>
+                  <a:srgbClr val="5F6272"/>
+                </a:solidFill>
+              </a:rPr>
+              <a:t>12</a:t>
+            </a:fld>
           </a:p>
         </p:txBody>
       </p:sp>
@@ -6339,6 +6475,40 @@
               <a:t xml:space="preserve">₁)</a:t>
             </a:r>
             <a:endParaRPr lang="en-US" sz="2325" dirty="0"/>
+          </a:p>
+        </p:txBody>
+      </p:sp>
+      <p:sp>
+        <p:nvSpPr>
+          <p:cNvPr id="12" name="Slide Number 12"/>
+          <p:cNvSpPr txBox="1"/>
+          <p:nvPr/>
+        </p:nvSpPr>
+        <p:spPr>
+          <a:xfrm>
+            <a:off x="11277295" y="6611112"/>
+            <a:ext cx="685800" cy="201168"/>
+          </a:xfrm>
+          <a:prstGeom prst="rect">
+            <a:avLst/>
+          </a:prstGeom>
+          <a:noFill/>
+        </p:spPr>
+        <p:txBody>
+          <a:bodyPr wrap="none" lIns="0" tIns="0" rIns="0" bIns="0" anchor="b">
+            <a:noAutofit/>
+          </a:bodyPr>
+          <a:lstStyle/>
+          <a:p>
+            <a:pPr algn="r"/>
+            <a:fld id="{5C1A6E0B-3B1F-4D5E-9C7A-2F4B8D6E1A90}" type="slidenum">
+              <a:rPr lang="en-US" sz="1200" dirty="0">
+                <a:solidFill>
+                  <a:srgbClr val="5F6272"/>
+                </a:solidFill>
+              </a:rPr>
+              <a:t>13</a:t>
+            </a:fld>
           </a:p>
         </p:txBody>
       </p:sp>
@@ -7763,6 +7933,40 @@
           </a:p>
         </p:txBody>
       </p:sp>
+      <p:sp>
+        <p:nvSpPr>
+          <p:cNvPr id="14" name="Slide Number 14"/>
+          <p:cNvSpPr txBox="1"/>
+          <p:nvPr/>
+        </p:nvSpPr>
+        <p:spPr>
+          <a:xfrm>
+            <a:off x="11277295" y="6611112"/>
+            <a:ext cx="685800" cy="201168"/>
+          </a:xfrm>
+          <a:prstGeom prst="rect">
+            <a:avLst/>
+          </a:prstGeom>
+          <a:noFill/>
+        </p:spPr>
+        <p:txBody>
+          <a:bodyPr wrap="none" lIns="0" tIns="0" rIns="0" bIns="0" anchor="b">
+            <a:noAutofit/>
+          </a:bodyPr>
+          <a:lstStyle/>
+          <a:p>
+            <a:pPr algn="r"/>
+            <a:fld id="{5C1A6E0B-3B1F-4D5E-9C7A-2F4B8D6E1A90}" type="slidenum">
+              <a:rPr lang="en-US" sz="1200" dirty="0">
+                <a:solidFill>
+                  <a:srgbClr val="5F6272"/>
+                </a:solidFill>
+              </a:rPr>
+              <a:t>14</a:t>
+            </a:fld>
+          </a:p>
+        </p:txBody>
+      </p:sp>
     </p:spTree>
   </p:cSld>
   <p:clrMapOvr>
@@ -11901,6 +12105,40 @@
               <a:t xml:space="preserve">x</a:t>
             </a:r>
             <a:endParaRPr lang="en-US" sz="2325" dirty="0"/>
+          </a:p>
+        </p:txBody>
+      </p:sp>
+      <p:sp>
+        <p:nvSpPr>
+          <p:cNvPr id="79" name="Slide Number 79"/>
+          <p:cNvSpPr txBox="1"/>
+          <p:nvPr/>
+        </p:nvSpPr>
+        <p:spPr>
+          <a:xfrm>
+            <a:off x="11277295" y="6611112"/>
+            <a:ext cx="685800" cy="201168"/>
+          </a:xfrm>
+          <a:prstGeom prst="rect">
+            <a:avLst/>
+          </a:prstGeom>
+          <a:noFill/>
+        </p:spPr>
+        <p:txBody>
+          <a:bodyPr wrap="none" lIns="0" tIns="0" rIns="0" bIns="0" anchor="b">
+            <a:noAutofit/>
+          </a:bodyPr>
+          <a:lstStyle/>
+          <a:p>
+            <a:pPr algn="r"/>
+            <a:fld id="{5C1A6E0B-3B1F-4D5E-9C7A-2F4B8D6E1A90}" type="slidenum">
+              <a:rPr lang="en-US" sz="1200" dirty="0">
+                <a:solidFill>
+                  <a:srgbClr val="5F6272"/>
+                </a:solidFill>
+              </a:rPr>
+              <a:t>15</a:t>
+            </a:fld>
           </a:p>
         </p:txBody>
       </p:sp>
@@ -15847,6 +16085,40 @@
           </a:p>
         </p:txBody>
       </p:sp>
+      <p:sp>
+        <p:nvSpPr>
+          <p:cNvPr id="57" name="Slide Number 57"/>
+          <p:cNvSpPr txBox="1"/>
+          <p:nvPr/>
+        </p:nvSpPr>
+        <p:spPr>
+          <a:xfrm>
+            <a:off x="11277295" y="6611112"/>
+            <a:ext cx="685800" cy="201168"/>
+          </a:xfrm>
+          <a:prstGeom prst="rect">
+            <a:avLst/>
+          </a:prstGeom>
+          <a:noFill/>
+        </p:spPr>
+        <p:txBody>
+          <a:bodyPr wrap="none" lIns="0" tIns="0" rIns="0" bIns="0" anchor="b">
+            <a:noAutofit/>
+          </a:bodyPr>
+          <a:lstStyle/>
+          <a:p>
+            <a:pPr algn="r"/>
+            <a:fld id="{5C1A6E0B-3B1F-4D5E-9C7A-2F4B8D6E1A90}" type="slidenum">
+              <a:rPr lang="en-US" sz="1200" dirty="0">
+                <a:solidFill>
+                  <a:srgbClr val="5F6272"/>
+                </a:solidFill>
+              </a:rPr>
+              <a:t>16</a:t>
+            </a:fld>
+          </a:p>
+        </p:txBody>
+      </p:sp>
     </p:spTree>
   </p:cSld>
   <p:clrMapOvr>
@@ -17095,6 +17367,40 @@
           </a:p>
         </p:txBody>
       </p:sp>
+      <p:sp>
+        <p:nvSpPr>
+          <p:cNvPr id="11" name="Slide Number 11"/>
+          <p:cNvSpPr txBox="1"/>
+          <p:nvPr/>
+        </p:nvSpPr>
+        <p:spPr>
+          <a:xfrm>
+            <a:off x="11277295" y="6611112"/>
+            <a:ext cx="685800" cy="201168"/>
+          </a:xfrm>
+          <a:prstGeom prst="rect">
+            <a:avLst/>
+          </a:prstGeom>
+          <a:noFill/>
+        </p:spPr>
+        <p:txBody>
+          <a:bodyPr wrap="none" lIns="0" tIns="0" rIns="0" bIns="0" anchor="b">
+            <a:noAutofit/>
+          </a:bodyPr>
+          <a:lstStyle/>
+          <a:p>
+            <a:pPr algn="r"/>
+            <a:fld id="{5C1A6E0B-3B1F-4D5E-9C7A-2F4B8D6E1A90}" type="slidenum">
+              <a:rPr lang="en-US" sz="1200" dirty="0">
+                <a:solidFill>
+                  <a:srgbClr val="5F6272"/>
+                </a:solidFill>
+              </a:rPr>
+              <a:t>17</a:t>
+            </a:fld>
+          </a:p>
+        </p:txBody>
+      </p:sp>
     </p:spTree>
   </p:cSld>
   <p:clrMapOvr>
@@ -17384,6 +17690,40 @@
           </a:p>
         </p:txBody>
       </p:sp>
+      <p:sp>
+        <p:nvSpPr>
+          <p:cNvPr id="5" name="Slide Number 5"/>
+          <p:cNvSpPr txBox="1"/>
+          <p:nvPr/>
+        </p:nvSpPr>
+        <p:spPr>
+          <a:xfrm>
+            <a:off x="11277295" y="6611112"/>
+            <a:ext cx="685800" cy="201168"/>
+          </a:xfrm>
+          <a:prstGeom prst="rect">
+            <a:avLst/>
+          </a:prstGeom>
+          <a:noFill/>
+        </p:spPr>
+        <p:txBody>
+          <a:bodyPr wrap="none" lIns="0" tIns="0" rIns="0" bIns="0" anchor="b">
+            <a:noAutofit/>
+          </a:bodyPr>
+          <a:lstStyle/>
+          <a:p>
+            <a:pPr algn="r"/>
+            <a:fld id="{5C1A6E0B-3B1F-4D5E-9C7A-2F4B8D6E1A90}" type="slidenum">
+              <a:rPr lang="en-US" sz="1200" dirty="0">
+                <a:solidFill>
+                  <a:srgbClr val="5F6272"/>
+                </a:solidFill>
+              </a:rPr>
+              <a:t>18</a:t>
+            </a:fld>
+          </a:p>
+        </p:txBody>
+      </p:sp>
     </p:spTree>
   </p:cSld>
   <p:clrMapOvr>
@@ -18794,6 +19134,40 @@
               <a:t xml:space="preserve">(0, −5)</a:t>
             </a:r>
             <a:endParaRPr lang="en-US" sz="2325" dirty="0"/>
+          </a:p>
+        </p:txBody>
+      </p:sp>
+      <p:sp>
+        <p:nvSpPr>
+          <p:cNvPr id="12" name="Slide Number 12"/>
+          <p:cNvSpPr txBox="1"/>
+          <p:nvPr/>
+        </p:nvSpPr>
+        <p:spPr>
+          <a:xfrm>
+            <a:off x="11277295" y="6611112"/>
+            <a:ext cx="685800" cy="201168"/>
+          </a:xfrm>
+          <a:prstGeom prst="rect">
+            <a:avLst/>
+          </a:prstGeom>
+          <a:noFill/>
+        </p:spPr>
+        <p:txBody>
+          <a:bodyPr wrap="none" lIns="0" tIns="0" rIns="0" bIns="0" anchor="b">
+            <a:noAutofit/>
+          </a:bodyPr>
+          <a:lstStyle/>
+          <a:p>
+            <a:pPr algn="r"/>
+            <a:fld id="{5C1A6E0B-3B1F-4D5E-9C7A-2F4B8D6E1A90}" type="slidenum">
+              <a:rPr lang="en-US" sz="1200" dirty="0">
+                <a:solidFill>
+                  <a:srgbClr val="5F6272"/>
+                </a:solidFill>
+              </a:rPr>
+              <a:t>19</a:t>
+            </a:fld>
           </a:p>
         </p:txBody>
       </p:sp>
@@ -20037,6 +20411,40 @@
           </a:p>
         </p:txBody>
       </p:sp>
+      <p:sp>
+        <p:nvSpPr>
+          <p:cNvPr id="12" name="Slide Number 12"/>
+          <p:cNvSpPr txBox="1"/>
+          <p:nvPr/>
+        </p:nvSpPr>
+        <p:spPr>
+          <a:xfrm>
+            <a:off x="11277295" y="6611112"/>
+            <a:ext cx="685800" cy="201168"/>
+          </a:xfrm>
+          <a:prstGeom prst="rect">
+            <a:avLst/>
+          </a:prstGeom>
+          <a:noFill/>
+        </p:spPr>
+        <p:txBody>
+          <a:bodyPr wrap="none" lIns="0" tIns="0" rIns="0" bIns="0" anchor="b">
+            <a:noAutofit/>
+          </a:bodyPr>
+          <a:lstStyle/>
+          <a:p>
+            <a:pPr algn="r"/>
+            <a:fld id="{5C1A6E0B-3B1F-4D5E-9C7A-2F4B8D6E1A90}" type="slidenum">
+              <a:rPr lang="en-US" sz="1200" dirty="0">
+                <a:solidFill>
+                  <a:srgbClr val="5F6272"/>
+                </a:solidFill>
+              </a:rPr>
+              <a:t>2</a:t>
+            </a:fld>
+          </a:p>
+        </p:txBody>
+      </p:sp>
     </p:spTree>
   </p:cSld>
   <p:clrMapOvr>
@@ -22412,6 +22820,40 @@
               <a:t xml:space="preserve"> + 5</a:t>
             </a:r>
             <a:endParaRPr lang="en-US" sz="2325" dirty="0"/>
+          </a:p>
+        </p:txBody>
+      </p:sp>
+      <p:sp>
+        <p:nvSpPr>
+          <p:cNvPr id="28" name="Slide Number 28"/>
+          <p:cNvSpPr txBox="1"/>
+          <p:nvPr/>
+        </p:nvSpPr>
+        <p:spPr>
+          <a:xfrm>
+            <a:off x="11277295" y="6611112"/>
+            <a:ext cx="685800" cy="201168"/>
+          </a:xfrm>
+          <a:prstGeom prst="rect">
+            <a:avLst/>
+          </a:prstGeom>
+          <a:noFill/>
+        </p:spPr>
+        <p:txBody>
+          <a:bodyPr wrap="none" lIns="0" tIns="0" rIns="0" bIns="0" anchor="b">
+            <a:noAutofit/>
+          </a:bodyPr>
+          <a:lstStyle/>
+          <a:p>
+            <a:pPr algn="r"/>
+            <a:fld id="{5C1A6E0B-3B1F-4D5E-9C7A-2F4B8D6E1A90}" type="slidenum">
+              <a:rPr lang="en-US" sz="1200" dirty="0">
+                <a:solidFill>
+                  <a:srgbClr val="5F6272"/>
+                </a:solidFill>
+              </a:rPr>
+              <a:t>20</a:t>
+            </a:fld>
           </a:p>
         </p:txBody>
       </p:sp>
@@ -24663,6 +25105,40 @@
           </a:p>
         </p:txBody>
       </p:sp>
+      <p:sp>
+        <p:nvSpPr>
+          <p:cNvPr id="12" name="Slide Number 12"/>
+          <p:cNvSpPr txBox="1"/>
+          <p:nvPr/>
+        </p:nvSpPr>
+        <p:spPr>
+          <a:xfrm>
+            <a:off x="11277295" y="6611112"/>
+            <a:ext cx="685800" cy="201168"/>
+          </a:xfrm>
+          <a:prstGeom prst="rect">
+            <a:avLst/>
+          </a:prstGeom>
+          <a:noFill/>
+        </p:spPr>
+        <p:txBody>
+          <a:bodyPr wrap="none" lIns="0" tIns="0" rIns="0" bIns="0" anchor="b">
+            <a:noAutofit/>
+          </a:bodyPr>
+          <a:lstStyle/>
+          <a:p>
+            <a:pPr algn="r"/>
+            <a:fld id="{5C1A6E0B-3B1F-4D5E-9C7A-2F4B8D6E1A90}" type="slidenum">
+              <a:rPr lang="en-US" sz="1200" dirty="0">
+                <a:solidFill>
+                  <a:srgbClr val="5F6272"/>
+                </a:solidFill>
+              </a:rPr>
+              <a:t>21</a:t>
+            </a:fld>
+          </a:p>
+        </p:txBody>
+      </p:sp>
     </p:spTree>
   </p:cSld>
   <p:clrMapOvr>
@@ -28121,6 +28597,40 @@
           </a:p>
         </p:txBody>
       </p:sp>
+      <p:sp>
+        <p:nvSpPr>
+          <p:cNvPr id="74" name="Slide Number 74"/>
+          <p:cNvSpPr txBox="1"/>
+          <p:nvPr/>
+        </p:nvSpPr>
+        <p:spPr>
+          <a:xfrm>
+            <a:off x="11277295" y="6611112"/>
+            <a:ext cx="685800" cy="201168"/>
+          </a:xfrm>
+          <a:prstGeom prst="rect">
+            <a:avLst/>
+          </a:prstGeom>
+          <a:noFill/>
+        </p:spPr>
+        <p:txBody>
+          <a:bodyPr wrap="none" lIns="0" tIns="0" rIns="0" bIns="0" anchor="b">
+            <a:noAutofit/>
+          </a:bodyPr>
+          <a:lstStyle/>
+          <a:p>
+            <a:pPr algn="r"/>
+            <a:fld id="{5C1A6E0B-3B1F-4D5E-9C7A-2F4B8D6E1A90}" type="slidenum">
+              <a:rPr lang="en-US" sz="1200" dirty="0">
+                <a:solidFill>
+                  <a:srgbClr val="5F6272"/>
+                </a:solidFill>
+              </a:rPr>
+              <a:t>22</a:t>
+            </a:fld>
+          </a:p>
+        </p:txBody>
+      </p:sp>
     </p:spTree>
   </p:cSld>
   <p:clrMapOvr>
@@ -29506,6 +30016,40 @@
               <a:t xml:space="preserve">Translated down 7.</a:t>
             </a:r>
             <a:endParaRPr lang="en-US" sz="1575" dirty="0"/>
+          </a:p>
+        </p:txBody>
+      </p:sp>
+      <p:sp>
+        <p:nvSpPr>
+          <p:cNvPr id="20" name="Slide Number 20"/>
+          <p:cNvSpPr txBox="1"/>
+          <p:nvPr/>
+        </p:nvSpPr>
+        <p:spPr>
+          <a:xfrm>
+            <a:off x="11277295" y="6611112"/>
+            <a:ext cx="685800" cy="201168"/>
+          </a:xfrm>
+          <a:prstGeom prst="rect">
+            <a:avLst/>
+          </a:prstGeom>
+          <a:noFill/>
+        </p:spPr>
+        <p:txBody>
+          <a:bodyPr wrap="none" lIns="0" tIns="0" rIns="0" bIns="0" anchor="b">
+            <a:noAutofit/>
+          </a:bodyPr>
+          <a:lstStyle/>
+          <a:p>
+            <a:pPr algn="r"/>
+            <a:fld id="{5C1A6E0B-3B1F-4D5E-9C7A-2F4B8D6E1A90}" type="slidenum">
+              <a:rPr lang="en-US" sz="1200" dirty="0">
+                <a:solidFill>
+                  <a:srgbClr val="5F6272"/>
+                </a:solidFill>
+              </a:rPr>
+              <a:t>23</a:t>
+            </a:fld>
           </a:p>
         </p:txBody>
       </p:sp>
@@ -31095,6 +31639,40 @@
           </a:p>
         </p:txBody>
       </p:sp>
+      <p:sp>
+        <p:nvSpPr>
+          <p:cNvPr id="6" name="Slide Number 6"/>
+          <p:cNvSpPr txBox="1"/>
+          <p:nvPr/>
+        </p:nvSpPr>
+        <p:spPr>
+          <a:xfrm>
+            <a:off x="11277295" y="6611112"/>
+            <a:ext cx="685800" cy="201168"/>
+          </a:xfrm>
+          <a:prstGeom prst="rect">
+            <a:avLst/>
+          </a:prstGeom>
+          <a:noFill/>
+        </p:spPr>
+        <p:txBody>
+          <a:bodyPr wrap="none" lIns="0" tIns="0" rIns="0" bIns="0" anchor="b">
+            <a:noAutofit/>
+          </a:bodyPr>
+          <a:lstStyle/>
+          <a:p>
+            <a:pPr algn="r"/>
+            <a:fld id="{5C1A6E0B-3B1F-4D5E-9C7A-2F4B8D6E1A90}" type="slidenum">
+              <a:rPr lang="en-US" sz="1200" dirty="0">
+                <a:solidFill>
+                  <a:srgbClr val="5F6272"/>
+                </a:solidFill>
+              </a:rPr>
+              <a:t>24</a:t>
+            </a:fld>
+          </a:p>
+        </p:txBody>
+      </p:sp>
     </p:spTree>
   </p:cSld>
   <p:clrMapOvr>
@@ -32232,6 +32810,40 @@
               <a:t xml:space="preserve">(2, −10)</a:t>
             </a:r>
             <a:endParaRPr lang="en-US" sz="2325" dirty="0"/>
+          </a:p>
+        </p:txBody>
+      </p:sp>
+      <p:sp>
+        <p:nvSpPr>
+          <p:cNvPr id="10" name="Slide Number 10"/>
+          <p:cNvSpPr txBox="1"/>
+          <p:nvPr/>
+        </p:nvSpPr>
+        <p:spPr>
+          <a:xfrm>
+            <a:off x="11277295" y="6611112"/>
+            <a:ext cx="685800" cy="201168"/>
+          </a:xfrm>
+          <a:prstGeom prst="rect">
+            <a:avLst/>
+          </a:prstGeom>
+          <a:noFill/>
+        </p:spPr>
+        <p:txBody>
+          <a:bodyPr wrap="none" lIns="0" tIns="0" rIns="0" bIns="0" anchor="b">
+            <a:noAutofit/>
+          </a:bodyPr>
+          <a:lstStyle/>
+          <a:p>
+            <a:pPr algn="r"/>
+            <a:fld id="{5C1A6E0B-3B1F-4D5E-9C7A-2F4B8D6E1A90}" type="slidenum">
+              <a:rPr lang="en-US" sz="1200" dirty="0">
+                <a:solidFill>
+                  <a:srgbClr val="5F6272"/>
+                </a:solidFill>
+              </a:rPr>
+              <a:t>25</a:t>
+            </a:fld>
           </a:p>
         </p:txBody>
       </p:sp>
@@ -36254,6 +36866,40 @@
           </a:p>
         </p:txBody>
       </p:sp>
+      <p:sp>
+        <p:nvSpPr>
+          <p:cNvPr id="119" name="Slide Number 119"/>
+          <p:cNvSpPr txBox="1"/>
+          <p:nvPr/>
+        </p:nvSpPr>
+        <p:spPr>
+          <a:xfrm>
+            <a:off x="11277295" y="6611112"/>
+            <a:ext cx="685800" cy="201168"/>
+          </a:xfrm>
+          <a:prstGeom prst="rect">
+            <a:avLst/>
+          </a:prstGeom>
+          <a:noFill/>
+        </p:spPr>
+        <p:txBody>
+          <a:bodyPr wrap="none" lIns="0" tIns="0" rIns="0" bIns="0" anchor="b">
+            <a:noAutofit/>
+          </a:bodyPr>
+          <a:lstStyle/>
+          <a:p>
+            <a:pPr algn="r"/>
+            <a:fld id="{5C1A6E0B-3B1F-4D5E-9C7A-2F4B8D6E1A90}" type="slidenum">
+              <a:rPr lang="en-US" sz="1200" dirty="0">
+                <a:solidFill>
+                  <a:srgbClr val="5F6272"/>
+                </a:solidFill>
+              </a:rPr>
+              <a:t>26</a:t>
+            </a:fld>
+          </a:p>
+        </p:txBody>
+      </p:sp>
     </p:spTree>
   </p:cSld>
   <p:clrMapOvr>
@@ -37115,6 +37761,40 @@
           </a:p>
         </p:txBody>
       </p:sp>
+      <p:sp>
+        <p:nvSpPr>
+          <p:cNvPr id="15" name="Slide Number 15"/>
+          <p:cNvSpPr txBox="1"/>
+          <p:nvPr/>
+        </p:nvSpPr>
+        <p:spPr>
+          <a:xfrm>
+            <a:off x="11277295" y="6611112"/>
+            <a:ext cx="685800" cy="201168"/>
+          </a:xfrm>
+          <a:prstGeom prst="rect">
+            <a:avLst/>
+          </a:prstGeom>
+          <a:noFill/>
+        </p:spPr>
+        <p:txBody>
+          <a:bodyPr wrap="none" lIns="0" tIns="0" rIns="0" bIns="0" anchor="b">
+            <a:noAutofit/>
+          </a:bodyPr>
+          <a:lstStyle/>
+          <a:p>
+            <a:pPr algn="r"/>
+            <a:fld id="{5C1A6E0B-3B1F-4D5E-9C7A-2F4B8D6E1A90}" type="slidenum">
+              <a:rPr lang="en-US" sz="1200" dirty="0">
+                <a:solidFill>
+                  <a:srgbClr val="5F6272"/>
+                </a:solidFill>
+              </a:rPr>
+              <a:t>27</a:t>
+            </a:fld>
+          </a:p>
+        </p:txBody>
+      </p:sp>
     </p:spTree>
   </p:cSld>
   <p:clrMapOvr>
@@ -37688,6 +38368,40 @@
               <a:t xml:space="preserve"> is the parent of the linear function family.</a:t>
             </a:r>
             <a:endParaRPr lang="en-US" sz="1575" dirty="0"/>
+          </a:p>
+        </p:txBody>
+      </p:sp>
+      <p:sp>
+        <p:nvSpPr>
+          <p:cNvPr id="9" name="Slide Number 9"/>
+          <p:cNvSpPr txBox="1"/>
+          <p:nvPr/>
+        </p:nvSpPr>
+        <p:spPr>
+          <a:xfrm>
+            <a:off x="11277295" y="6611112"/>
+            <a:ext cx="685800" cy="201168"/>
+          </a:xfrm>
+          <a:prstGeom prst="rect">
+            <a:avLst/>
+          </a:prstGeom>
+          <a:noFill/>
+        </p:spPr>
+        <p:txBody>
+          <a:bodyPr wrap="none" lIns="0" tIns="0" rIns="0" bIns="0" anchor="b">
+            <a:noAutofit/>
+          </a:bodyPr>
+          <a:lstStyle/>
+          <a:p>
+            <a:pPr algn="r"/>
+            <a:fld id="{5C1A6E0B-3B1F-4D5E-9C7A-2F4B8D6E1A90}" type="slidenum">
+              <a:rPr lang="en-US" sz="1200" dirty="0">
+                <a:solidFill>
+                  <a:srgbClr val="5F6272"/>
+                </a:solidFill>
+              </a:rPr>
+              <a:t>3</a:t>
+            </a:fld>
           </a:p>
         </p:txBody>
       </p:sp>
@@ -38396,6 +39110,40 @@
           </a:p>
         </p:txBody>
       </p:sp>
+      <p:sp>
+        <p:nvSpPr>
+          <p:cNvPr id="5" name="Slide Number 5"/>
+          <p:cNvSpPr txBox="1"/>
+          <p:nvPr/>
+        </p:nvSpPr>
+        <p:spPr>
+          <a:xfrm>
+            <a:off x="11277295" y="6611112"/>
+            <a:ext cx="685800" cy="201168"/>
+          </a:xfrm>
+          <a:prstGeom prst="rect">
+            <a:avLst/>
+          </a:prstGeom>
+          <a:noFill/>
+        </p:spPr>
+        <p:txBody>
+          <a:bodyPr wrap="none" lIns="0" tIns="0" rIns="0" bIns="0" anchor="b">
+            <a:noAutofit/>
+          </a:bodyPr>
+          <a:lstStyle/>
+          <a:p>
+            <a:pPr algn="r"/>
+            <a:fld id="{5C1A6E0B-3B1F-4D5E-9C7A-2F4B8D6E1A90}" type="slidenum">
+              <a:rPr lang="en-US" sz="1200" dirty="0">
+                <a:solidFill>
+                  <a:srgbClr val="5F6272"/>
+                </a:solidFill>
+              </a:rPr>
+              <a:t>4</a:t>
+            </a:fld>
+          </a:p>
+        </p:txBody>
+      </p:sp>
     </p:spTree>
   </p:cSld>
   <p:clrMapOvr>
@@ -40802,6 +41550,40 @@
               <a:t xml:space="preserve">CD</a:t>
             </a:r>
             <a:endParaRPr lang="en-US" sz="1275" dirty="0"/>
+          </a:p>
+        </p:txBody>
+      </p:sp>
+      <p:sp>
+        <p:nvSpPr>
+          <p:cNvPr id="60" name="Slide Number 60"/>
+          <p:cNvSpPr txBox="1"/>
+          <p:nvPr/>
+        </p:nvSpPr>
+        <p:spPr>
+          <a:xfrm>
+            <a:off x="11277295" y="6611112"/>
+            <a:ext cx="685800" cy="201168"/>
+          </a:xfrm>
+          <a:prstGeom prst="rect">
+            <a:avLst/>
+          </a:prstGeom>
+          <a:noFill/>
+        </p:spPr>
+        <p:txBody>
+          <a:bodyPr wrap="none" lIns="0" tIns="0" rIns="0" bIns="0" anchor="b">
+            <a:noAutofit/>
+          </a:bodyPr>
+          <a:lstStyle/>
+          <a:p>
+            <a:pPr algn="r"/>
+            <a:fld id="{5C1A6E0B-3B1F-4D5E-9C7A-2F4B8D6E1A90}" type="slidenum">
+              <a:rPr lang="en-US" sz="1200" dirty="0">
+                <a:solidFill>
+                  <a:srgbClr val="5F6272"/>
+                </a:solidFill>
+              </a:rPr>
+              <a:t>5</a:t>
+            </a:fld>
           </a:p>
         </p:txBody>
       </p:sp>
@@ -43194,6 +43976,40 @@
               <a:t xml:space="preserve">GH</a:t>
             </a:r>
             <a:endParaRPr lang="en-US" sz="1275" dirty="0"/>
+          </a:p>
+        </p:txBody>
+      </p:sp>
+      <p:sp>
+        <p:nvSpPr>
+          <p:cNvPr id="59" name="Slide Number 59"/>
+          <p:cNvSpPr txBox="1"/>
+          <p:nvPr/>
+        </p:nvSpPr>
+        <p:spPr>
+          <a:xfrm>
+            <a:off x="11277295" y="6611112"/>
+            <a:ext cx="685800" cy="201168"/>
+          </a:xfrm>
+          <a:prstGeom prst="rect">
+            <a:avLst/>
+          </a:prstGeom>
+          <a:noFill/>
+        </p:spPr>
+        <p:txBody>
+          <a:bodyPr wrap="none" lIns="0" tIns="0" rIns="0" bIns="0" anchor="b">
+            <a:noAutofit/>
+          </a:bodyPr>
+          <a:lstStyle/>
+          <a:p>
+            <a:pPr algn="r"/>
+            <a:fld id="{5C1A6E0B-3B1F-4D5E-9C7A-2F4B8D6E1A90}" type="slidenum">
+              <a:rPr lang="en-US" sz="1200" dirty="0">
+                <a:solidFill>
+                  <a:srgbClr val="5F6272"/>
+                </a:solidFill>
+              </a:rPr>
+              <a:t>6</a:t>
+            </a:fld>
           </a:p>
         </p:txBody>
       </p:sp>
@@ -48223,6 +49039,40 @@
               <a:t xml:space="preserve">: the output went up 5.</a:t>
             </a:r>
             <a:endParaRPr lang="en-US" sz="1575" dirty="0"/>
+          </a:p>
+        </p:txBody>
+      </p:sp>
+      <p:sp>
+        <p:nvSpPr>
+          <p:cNvPr id="114" name="Slide Number 114"/>
+          <p:cNvSpPr txBox="1"/>
+          <p:nvPr/>
+        </p:nvSpPr>
+        <p:spPr>
+          <a:xfrm>
+            <a:off x="11277295" y="6611112"/>
+            <a:ext cx="685800" cy="201168"/>
+          </a:xfrm>
+          <a:prstGeom prst="rect">
+            <a:avLst/>
+          </a:prstGeom>
+          <a:noFill/>
+        </p:spPr>
+        <p:txBody>
+          <a:bodyPr wrap="none" lIns="0" tIns="0" rIns="0" bIns="0" anchor="b">
+            <a:noAutofit/>
+          </a:bodyPr>
+          <a:lstStyle/>
+          <a:p>
+            <a:pPr algn="r"/>
+            <a:fld id="{5C1A6E0B-3B1F-4D5E-9C7A-2F4B8D6E1A90}" type="slidenum">
+              <a:rPr lang="en-US" sz="1200" dirty="0">
+                <a:solidFill>
+                  <a:srgbClr val="5F6272"/>
+                </a:solidFill>
+              </a:rPr>
+              <a:t>7</a:t>
+            </a:fld>
           </a:p>
         </p:txBody>
       </p:sp>
@@ -50417,6 +51267,40 @@
           </a:p>
         </p:txBody>
       </p:sp>
+      <p:sp>
+        <p:nvSpPr>
+          <p:cNvPr id="7" name="Slide Number 7"/>
+          <p:cNvSpPr txBox="1"/>
+          <p:nvPr/>
+        </p:nvSpPr>
+        <p:spPr>
+          <a:xfrm>
+            <a:off x="11277295" y="6611112"/>
+            <a:ext cx="685800" cy="201168"/>
+          </a:xfrm>
+          <a:prstGeom prst="rect">
+            <a:avLst/>
+          </a:prstGeom>
+          <a:noFill/>
+        </p:spPr>
+        <p:txBody>
+          <a:bodyPr wrap="none" lIns="0" tIns="0" rIns="0" bIns="0" anchor="b">
+            <a:noAutofit/>
+          </a:bodyPr>
+          <a:lstStyle/>
+          <a:p>
+            <a:pPr algn="r"/>
+            <a:fld id="{5C1A6E0B-3B1F-4D5E-9C7A-2F4B8D6E1A90}" type="slidenum">
+              <a:rPr lang="en-US" sz="1200" dirty="0">
+                <a:solidFill>
+                  <a:srgbClr val="5F6272"/>
+                </a:solidFill>
+              </a:rPr>
+              <a:t>8</a:t>
+            </a:fld>
+          </a:p>
+        </p:txBody>
+      </p:sp>
     </p:spTree>
   </p:cSld>
   <p:clrMapOvr>
@@ -53006,6 +53890,40 @@
               <a:t xml:space="preserve">r(x)</a:t>
             </a:r>
             <a:endParaRPr lang="en-US" sz="1275" dirty="0"/>
+          </a:p>
+        </p:txBody>
+      </p:sp>
+      <p:sp>
+        <p:nvSpPr>
+          <p:cNvPr id="64" name="Slide Number 64"/>
+          <p:cNvSpPr txBox="1"/>
+          <p:nvPr/>
+        </p:nvSpPr>
+        <p:spPr>
+          <a:xfrm>
+            <a:off x="11277295" y="6611112"/>
+            <a:ext cx="685800" cy="201168"/>
+          </a:xfrm>
+          <a:prstGeom prst="rect">
+            <a:avLst/>
+          </a:prstGeom>
+          <a:noFill/>
+        </p:spPr>
+        <p:txBody>
+          <a:bodyPr wrap="none" lIns="0" tIns="0" rIns="0" bIns="0" anchor="b">
+            <a:noAutofit/>
+          </a:bodyPr>
+          <a:lstStyle/>
+          <a:p>
+            <a:pPr algn="r"/>
+            <a:fld id="{5C1A6E0B-3B1F-4D5E-9C7A-2F4B8D6E1A90}" type="slidenum">
+              <a:rPr lang="en-US" sz="1200" dirty="0">
+                <a:solidFill>
+                  <a:srgbClr val="5F6272"/>
+                </a:solidFill>
+              </a:rPr>
+              <a:t>9</a:t>
+            </a:fld>
           </a:p>
         </p:txBody>
       </p:sp>

--- a/Module 2 topic 2/t2-lesson1-transforming-linear-functions.pptx
+++ b/Module 2 topic 2/t2-lesson1-transforming-linear-functions.pptx
@@ -361,7 +361,7 @@
           <a:p>
             <a:r>
               <a:rPr lang="en-US" dirty="0"/>
-              <a:t>Added for this deck; not from the textbook. Have this up as students walk in; they work silently while you take attendance (about 5 minutes). The same 4 questions are on the online Day 2 bell work. Reveal the answers one at a time. Answer key: 1. A vertical translation adds to the output: g(x) = f(x) + 4 = x + 4. 2. A vertical translation changes only y: 5 − 3 = 2, so (2, 2). 3. A vertical translation does not change the slope. g(x) = 2x + 5 still has slope 2. 4. g(x) = 2x − 1 + 6 = 2x + 5, so the y-intercept moves from (0, −1) up 6 to (0, 5).</a:t>
+              <a:t>Added for this deck; not from the textbook. Have this up as students walk in; they work silently while you take attendance (about 5 minutes). The same 4 questions are on the online Day 2 bell work. Reveal the answers one at a time. Answer key: 1. A vertical translation adds to the output: g(x) = f(x) + 4 = x + 4. 2. A vertical translation changes only y: 5 − 3 = 2, so (2, 2). 3. A vertical translation does not change the slope. g(x) = 2x + 5 still has slope 2. 4. The − 2 is outside: it subtracts 2 from every output, so the graph moves down 2.</a:t>
             </a:r>
           </a:p>
         </p:txBody>
@@ -774,7 +774,7 @@
           <a:p>
             <a:r>
               <a:rPr lang="en-US" dirty="0"/>
-              <a:t>Added for this deck; not from the textbook. Have this up as students walk in; they work silently while you take attendance (about 5 minutes). The same 4 questions are on the online Day 3 bell work. Reveal the answers one at a time. Answer key: 1. g(x) = 3x. A vertical dilation by 3 multiplies the slope of f(x) = x by 3. 2. The 2 stretches the graph and the negative sign reflects it across the x-axis. 3. Multiplying by a number between 0 and 1 compresses the graph toward the x-axis. 4. g(x) = 2x − 5. The dilation keeps (0, 0) fixed, then the graph moves down 5.</a:t>
+              <a:t>Added for this deck; not from the textbook. Have this up as students walk in; they work silently while you take attendance (about 5 minutes). The same 4 questions are on the online Day 3 bell work. Reveal the answers one at a time. Answer key: 1. g(x) = 3x. A vertical dilation by 3 multiplies the slope of f(x) = x by 3. 2. The 2 stretches the graph and the negative sign reflects it across the x-axis. 3. Multiplying by a number between 0 and 1 compresses the graph toward the x-axis. 4. a = −2: the negative sign reflects across the x-axis, and |−2| = 2 stretches by 2.</a:t>
             </a:r>
           </a:p>
         </p:txBody>
@@ -833,7 +833,7 @@
           <a:p>
             <a:r>
               <a:rPr lang="en-US" dirty="0"/>
-              <a:t>Added for this deck; not from the textbook. Have this up as students walk in; they work silently while you take attendance (about 5 minutes). The same 4 questions are on the online Day 1 bell work. Reveal the answers one at a time. Answer key: 1. Slope = (11 − 2) ÷ (4 − 1) = 9 ÷ 3 = 3. 2. In y = mx + b, the y-intercept is (0, b), so it is (0, −7). 3. 2(−3) + 1 = −6 + 1 = −5. 4. Parallel lines have the same slope. Only y = 3x − 5 has slope 3.</a:t>
+              <a:t>Added for this deck; not from the textbook. Have this up as students walk in; they work silently while you take attendance (about 5 minutes). The same 4 questions are on the online Day 1 bell work. Reveal the answers one at a time. Answer key: 1. Slope = (11 − 2) ÷ (4 − 1) = 9 ÷ 3 = 3. 2. In y = mx + b, the y-intercept is (0, b), so it is (0, −7). 3. 2(−3) + 1 = −6 + 1 = −5. 4. Parallel: same slope 3. Put in the point: 5 = 3(1) + b, so b = 2 and y = 3x + 2.</a:t>
             </a:r>
           </a:p>
         </p:txBody>
@@ -4477,7 +4477,7 @@
         <p:spPr>
           <a:xfrm>
             <a:off x="6362548" y="3243834"/>
-            <a:ext cx="5143348" cy="649224"/>
+            <a:ext cx="5143348" cy="946404"/>
           </a:xfrm>
           <a:prstGeom prst="rect">
             <a:avLst/>
@@ -4506,7 +4506,7 @@
                 <a:latin typeface="Segoe UI"/>
                 <a:cs typeface="Segoe UI"/>
               </a:rPr>
-              <a:t xml:space="preserve">4. </a:t>
+              <a:t xml:space="preserve">4. The graph of </a:t>
             </a:r>
             <a:r>
               <a:rPr lang="en-US" sz="1950" dirty="0" i="1">
@@ -4546,7 +4546,7 @@
                 <a:latin typeface="Cambria"/>
                 <a:cs typeface="Cambria"/>
               </a:rPr>
-              <a:t xml:space="preserve">) = 2</a:t>
+              <a:t xml:space="preserve">) = </a:t>
             </a:r>
             <a:r>
               <a:rPr lang="en-US" sz="1950" dirty="0" i="1">
@@ -4563,20 +4563,30 @@
                 <a:solidFill>
                   <a:srgbClr val="16171D"/>
                 </a:solidFill>
-                <a:latin typeface="Cambria"/>
-                <a:cs typeface="Cambria"/>
-              </a:rPr>
-              <a:t xml:space="preserve"> − 1</a:t>
+                <a:latin typeface="Segoe UI"/>
+                <a:cs typeface="Segoe UI"/>
+              </a:rPr>
+              <a:t xml:space="preserve"> is transformed to make </a:t>
+            </a:r>
+            <a:r>
+              <a:rPr lang="en-US" sz="1950" dirty="0" i="1">
+                <a:solidFill>
+                  <a:srgbClr val="16171D"/>
+                </a:solidFill>
+                <a:latin typeface="Cambria"/>
+                <a:cs typeface="Cambria"/>
+              </a:rPr>
+              <a:t xml:space="preserve">g</a:t>
             </a:r>
             <a:r>
               <a:rPr lang="en-US" sz="1950" dirty="0">
                 <a:solidFill>
                   <a:srgbClr val="16171D"/>
                 </a:solidFill>
-                <a:latin typeface="Segoe UI"/>
-                <a:cs typeface="Segoe UI"/>
-              </a:rPr>
-              <a:t xml:space="preserve">. What is the </a:t>
+                <a:latin typeface="Cambria"/>
+                <a:cs typeface="Cambria"/>
+              </a:rPr>
+              <a:t xml:space="preserve">(</a:t>
             </a:r>
             <a:r>
               <a:rPr lang="en-US" sz="1950" dirty="0" i="1">
@@ -4586,17 +4596,17 @@
                 <a:latin typeface="Cambria"/>
                 <a:cs typeface="Cambria"/>
               </a:rPr>
-              <a:t xml:space="preserve">y</a:t>
+              <a:t xml:space="preserve">x</a:t>
             </a:r>
             <a:r>
               <a:rPr lang="en-US" sz="1950" dirty="0">
                 <a:solidFill>
                   <a:srgbClr val="16171D"/>
                 </a:solidFill>
-                <a:latin typeface="Segoe UI"/>
-                <a:cs typeface="Segoe UI"/>
-              </a:rPr>
-              <a:t xml:space="preserve">-intercept of </a:t>
+                <a:latin typeface="Cambria"/>
+                <a:cs typeface="Cambria"/>
+              </a:rPr>
+              <a:t xml:space="preserve">) = </a:t>
             </a:r>
             <a:r>
               <a:rPr lang="en-US" sz="1950" dirty="0" i="1">
@@ -4606,7 +4616,7 @@
                 <a:latin typeface="Cambria"/>
                 <a:cs typeface="Cambria"/>
               </a:rPr>
-              <a:t xml:space="preserve">g</a:t>
+              <a:t xml:space="preserve">x</a:t>
             </a:r>
             <a:r>
               <a:rPr lang="en-US" sz="1950" dirty="0">
@@ -4616,77 +4626,17 @@
                 <a:latin typeface="Cambria"/>
                 <a:cs typeface="Cambria"/>
               </a:rPr>
-              <a:t xml:space="preserve">(</a:t>
-            </a:r>
-            <a:r>
-              <a:rPr lang="en-US" sz="1950" dirty="0" i="1">
-                <a:solidFill>
-                  <a:srgbClr val="16171D"/>
-                </a:solidFill>
-                <a:latin typeface="Cambria"/>
-                <a:cs typeface="Cambria"/>
-              </a:rPr>
-              <a:t xml:space="preserve">x</a:t>
+              <a:t xml:space="preserve"> − 2</a:t>
             </a:r>
             <a:r>
               <a:rPr lang="en-US" sz="1950" dirty="0">
                 <a:solidFill>
                   <a:srgbClr val="16171D"/>
                 </a:solidFill>
-                <a:latin typeface="Cambria"/>
-                <a:cs typeface="Cambria"/>
-              </a:rPr>
-              <a:t xml:space="preserve">) = </a:t>
-            </a:r>
-            <a:r>
-              <a:rPr lang="en-US" sz="1950" dirty="0" i="1">
-                <a:solidFill>
-                  <a:srgbClr val="16171D"/>
-                </a:solidFill>
-                <a:latin typeface="Cambria"/>
-                <a:cs typeface="Cambria"/>
-              </a:rPr>
-              <a:t xml:space="preserve">f</a:t>
-            </a:r>
-            <a:r>
-              <a:rPr lang="en-US" sz="1950" dirty="0">
-                <a:solidFill>
-                  <a:srgbClr val="16171D"/>
-                </a:solidFill>
-                <a:latin typeface="Cambria"/>
-                <a:cs typeface="Cambria"/>
-              </a:rPr>
-              <a:t xml:space="preserve">(</a:t>
-            </a:r>
-            <a:r>
-              <a:rPr lang="en-US" sz="1950" dirty="0" i="1">
-                <a:solidFill>
-                  <a:srgbClr val="16171D"/>
-                </a:solidFill>
-                <a:latin typeface="Cambria"/>
-                <a:cs typeface="Cambria"/>
-              </a:rPr>
-              <a:t xml:space="preserve">x</a:t>
-            </a:r>
-            <a:r>
-              <a:rPr lang="en-US" sz="1950" dirty="0">
-                <a:solidFill>
-                  <a:srgbClr val="16171D"/>
-                </a:solidFill>
-                <a:latin typeface="Cambria"/>
-                <a:cs typeface="Cambria"/>
-              </a:rPr>
-              <a:t xml:space="preserve">) + 6</a:t>
-            </a:r>
-            <a:r>
-              <a:rPr lang="en-US" sz="1950" dirty="0">
-                <a:solidFill>
-                  <a:srgbClr val="16171D"/>
-                </a:solidFill>
-                <a:latin typeface="Segoe UI"/>
-                <a:cs typeface="Segoe UI"/>
-              </a:rPr>
-              <a:t xml:space="preserve">? </a:t>
+                <a:latin typeface="Segoe UI"/>
+                <a:cs typeface="Segoe UI"/>
+              </a:rPr>
+              <a:t xml:space="preserve">. Which describes the transformation? </a:t>
             </a:r>
             <a:r>
               <a:rPr lang="en-US" sz="1575" dirty="0">
@@ -4710,8 +4660,8 @@
         </p:nvSpPr>
         <p:spPr>
           <a:xfrm>
-            <a:off x="6362548" y="4026408"/>
-            <a:ext cx="2908021" cy="518922"/>
+            <a:off x="6362548" y="4323588"/>
+            <a:ext cx="5143348" cy="873252"/>
           </a:xfrm>
           <a:prstGeom prst="roundRect">
             <a:avLst>
@@ -4754,7 +4704,7 @@
                 <a:latin typeface="Cambria"/>
                 <a:cs typeface="Cambria"/>
               </a:rPr>
-              <a:t xml:space="preserve">(0, 5)</a:t>
+              <a:t xml:space="preserve">A translation down 2 units</a:t>
             </a:r>
             <a:endParaRPr lang="en-US" sz="2325" dirty="0"/>
           </a:p>
@@ -18814,7 +18764,7 @@
         <p:spPr>
           <a:xfrm>
             <a:off x="6362548" y="3243834"/>
-            <a:ext cx="5143348" cy="649224"/>
+            <a:ext cx="5143348" cy="946404"/>
           </a:xfrm>
           <a:prstGeom prst="rect">
             <a:avLst/>
@@ -18843,7 +18793,7 @@
                 <a:latin typeface="Segoe UI"/>
                 <a:cs typeface="Segoe UI"/>
               </a:rPr>
-              <a:t xml:space="preserve">4. </a:t>
+              <a:t xml:space="preserve">4. Which function is a reflection of </a:t>
             </a:r>
             <a:r>
               <a:rPr lang="en-US" sz="1950" dirty="0" i="1">
@@ -18903,7 +18853,7 @@
                 <a:latin typeface="Segoe UI"/>
                 <a:cs typeface="Segoe UI"/>
               </a:rPr>
-              <a:t xml:space="preserve"> and </a:t>
+              <a:t xml:space="preserve"> across the </a:t>
             </a:r>
             <a:r>
               <a:rPr lang="en-US" sz="1950" dirty="0" i="1">
@@ -18913,157 +18863,17 @@
                 <a:latin typeface="Cambria"/>
                 <a:cs typeface="Cambria"/>
               </a:rPr>
-              <a:t xml:space="preserve">g</a:t>
+              <a:t xml:space="preserve">x</a:t>
             </a:r>
             <a:r>
               <a:rPr lang="en-US" sz="1950" dirty="0">
                 <a:solidFill>
                   <a:srgbClr val="16171D"/>
                 </a:solidFill>
-                <a:latin typeface="Cambria"/>
-                <a:cs typeface="Cambria"/>
-              </a:rPr>
-              <a:t xml:space="preserve">(</a:t>
-            </a:r>
-            <a:r>
-              <a:rPr lang="en-US" sz="1950" dirty="0" i="1">
-                <a:solidFill>
-                  <a:srgbClr val="16171D"/>
-                </a:solidFill>
-                <a:latin typeface="Cambria"/>
-                <a:cs typeface="Cambria"/>
-              </a:rPr>
-              <a:t xml:space="preserve">x</a:t>
-            </a:r>
-            <a:r>
-              <a:rPr lang="en-US" sz="1950" dirty="0">
-                <a:solidFill>
-                  <a:srgbClr val="16171D"/>
-                </a:solidFill>
-                <a:latin typeface="Cambria"/>
-                <a:cs typeface="Cambria"/>
-              </a:rPr>
-              <a:t xml:space="preserve">) = 2</a:t>
-            </a:r>
-            <a:r>
-              <a:rPr lang="en-US" sz="1950" dirty="0" i="1">
-                <a:solidFill>
-                  <a:srgbClr val="16171D"/>
-                </a:solidFill>
-                <a:latin typeface="Cambria"/>
-                <a:cs typeface="Cambria"/>
-              </a:rPr>
-              <a:t xml:space="preserve">f</a:t>
-            </a:r>
-            <a:r>
-              <a:rPr lang="en-US" sz="1950" dirty="0">
-                <a:solidFill>
-                  <a:srgbClr val="16171D"/>
-                </a:solidFill>
-                <a:latin typeface="Cambria"/>
-                <a:cs typeface="Cambria"/>
-              </a:rPr>
-              <a:t xml:space="preserve">(</a:t>
-            </a:r>
-            <a:r>
-              <a:rPr lang="en-US" sz="1950" dirty="0" i="1">
-                <a:solidFill>
-                  <a:srgbClr val="16171D"/>
-                </a:solidFill>
-                <a:latin typeface="Cambria"/>
-                <a:cs typeface="Cambria"/>
-              </a:rPr>
-              <a:t xml:space="preserve">x</a:t>
-            </a:r>
-            <a:r>
-              <a:rPr lang="en-US" sz="1950" dirty="0">
-                <a:solidFill>
-                  <a:srgbClr val="16171D"/>
-                </a:solidFill>
-                <a:latin typeface="Cambria"/>
-                <a:cs typeface="Cambria"/>
-              </a:rPr>
-              <a:t xml:space="preserve">) − 5</a:t>
-            </a:r>
-            <a:r>
-              <a:rPr lang="en-US" sz="1950" dirty="0">
-                <a:solidFill>
-                  <a:srgbClr val="16171D"/>
-                </a:solidFill>
-                <a:latin typeface="Segoe UI"/>
-                <a:cs typeface="Segoe UI"/>
-              </a:rPr>
-              <a:t xml:space="preserve">. What is the </a:t>
-            </a:r>
-            <a:r>
-              <a:rPr lang="en-US" sz="1950" dirty="0" i="1">
-                <a:solidFill>
-                  <a:srgbClr val="16171D"/>
-                </a:solidFill>
-                <a:latin typeface="Cambria"/>
-                <a:cs typeface="Cambria"/>
-              </a:rPr>
-              <a:t xml:space="preserve">y</a:t>
-            </a:r>
-            <a:r>
-              <a:rPr lang="en-US" sz="1950" dirty="0">
-                <a:solidFill>
-                  <a:srgbClr val="16171D"/>
-                </a:solidFill>
-                <a:latin typeface="Segoe UI"/>
-                <a:cs typeface="Segoe UI"/>
-              </a:rPr>
-              <a:t xml:space="preserve">-intercept of </a:t>
-            </a:r>
-            <a:r>
-              <a:rPr lang="en-US" sz="1950" dirty="0" i="1">
-                <a:solidFill>
-                  <a:srgbClr val="16171D"/>
-                </a:solidFill>
-                <a:latin typeface="Cambria"/>
-                <a:cs typeface="Cambria"/>
-              </a:rPr>
-              <a:t xml:space="preserve">g</a:t>
-            </a:r>
-            <a:r>
-              <a:rPr lang="en-US" sz="1950" dirty="0">
-                <a:solidFill>
-                  <a:srgbClr val="16171D"/>
-                </a:solidFill>
-                <a:latin typeface="Cambria"/>
-                <a:cs typeface="Cambria"/>
-              </a:rPr>
-              <a:t xml:space="preserve">(</a:t>
-            </a:r>
-            <a:r>
-              <a:rPr lang="en-US" sz="1950" dirty="0" i="1">
-                <a:solidFill>
-                  <a:srgbClr val="16171D"/>
-                </a:solidFill>
-                <a:latin typeface="Cambria"/>
-                <a:cs typeface="Cambria"/>
-              </a:rPr>
-              <a:t xml:space="preserve">x</a:t>
-            </a:r>
-            <a:r>
-              <a:rPr lang="en-US" sz="1950" dirty="0">
-                <a:solidFill>
-                  <a:srgbClr val="16171D"/>
-                </a:solidFill>
-                <a:latin typeface="Cambria"/>
-                <a:cs typeface="Cambria"/>
-              </a:rPr>
-              <a:t xml:space="preserve">)</a:t>
-            </a:r>
-            <a:r>
-              <a:rPr lang="en-US" sz="1950" dirty="0">
-                <a:solidFill>
-                  <a:srgbClr val="16171D"/>
-                </a:solidFill>
-                <a:latin typeface="Segoe UI"/>
-                <a:cs typeface="Segoe UI"/>
-              </a:rPr>
-              <a:t xml:space="preserve">? </a:t>
+                <a:latin typeface="Segoe UI"/>
+                <a:cs typeface="Segoe UI"/>
+              </a:rPr>
+              <a:t xml:space="preserve">-axis and a vertical dilation by a factor of 2? </a:t>
             </a:r>
             <a:r>
               <a:rPr lang="en-US" sz="1575" dirty="0">
@@ -19073,7 +18883,7 @@
                 <a:latin typeface="Segoe UI"/>
                 <a:cs typeface="Segoe UI"/>
               </a:rPr>
-              <a:t xml:space="preserve">(SE p. 280)</a:t>
+              <a:t xml:space="preserve">(SE p. 278)</a:t>
             </a:r>
             <a:endParaRPr lang="en-US" sz="1950" dirty="0"/>
           </a:p>
@@ -19087,8 +18897,8 @@
         </p:nvSpPr>
         <p:spPr>
           <a:xfrm>
-            <a:off x="6362548" y="4026408"/>
-            <a:ext cx="3073847" cy="518922"/>
+            <a:off x="6362548" y="4323588"/>
+            <a:ext cx="3571326" cy="518922"/>
           </a:xfrm>
           <a:prstGeom prst="roundRect">
             <a:avLst>
@@ -19124,6 +18934,16 @@
               <a:t xml:space="preserve">ANSWER   </a:t>
             </a:r>
             <a:r>
+              <a:rPr lang="en-US" sz="2325" dirty="0" i="1">
+                <a:solidFill>
+                  <a:srgbClr val="16171D"/>
+                </a:solidFill>
+                <a:latin typeface="Cambria"/>
+                <a:cs typeface="Cambria"/>
+              </a:rPr>
+              <a:t xml:space="preserve">g</a:t>
+            </a:r>
+            <a:r>
               <a:rPr lang="en-US" sz="2325" dirty="0">
                 <a:solidFill>
                   <a:srgbClr val="16171D"/>
@@ -19131,7 +18951,37 @@
                 <a:latin typeface="Cambria"/>
                 <a:cs typeface="Cambria"/>
               </a:rPr>
-              <a:t xml:space="preserve">(0, −5)</a:t>
+              <a:t xml:space="preserve">(</a:t>
+            </a:r>
+            <a:r>
+              <a:rPr lang="en-US" sz="2325" dirty="0" i="1">
+                <a:solidFill>
+                  <a:srgbClr val="16171D"/>
+                </a:solidFill>
+                <a:latin typeface="Cambria"/>
+                <a:cs typeface="Cambria"/>
+              </a:rPr>
+              <a:t xml:space="preserve">x</a:t>
+            </a:r>
+            <a:r>
+              <a:rPr lang="en-US" sz="2325" dirty="0">
+                <a:solidFill>
+                  <a:srgbClr val="16171D"/>
+                </a:solidFill>
+                <a:latin typeface="Cambria"/>
+                <a:cs typeface="Cambria"/>
+              </a:rPr>
+              <a:t xml:space="preserve">) = −2</a:t>
+            </a:r>
+            <a:r>
+              <a:rPr lang="en-US" sz="2325" dirty="0" i="1">
+                <a:solidFill>
+                  <a:srgbClr val="16171D"/>
+                </a:solidFill>
+                <a:latin typeface="Cambria"/>
+                <a:cs typeface="Cambria"/>
+              </a:rPr>
+              <a:t xml:space="preserve">x</a:t>
             </a:r>
             <a:endParaRPr lang="en-US" sz="2325" dirty="0"/>
           </a:p>
@@ -20238,7 +20088,7 @@
         <p:spPr>
           <a:xfrm>
             <a:off x="6362548" y="2946654"/>
-            <a:ext cx="5143348" cy="352044"/>
+            <a:ext cx="5143348" cy="946404"/>
           </a:xfrm>
           <a:prstGeom prst="rect">
             <a:avLst/>
@@ -20267,7 +20117,7 @@
                 <a:latin typeface="Segoe UI"/>
                 <a:cs typeface="Segoe UI"/>
               </a:rPr>
-              <a:t xml:space="preserve">4. Which line is parallel to </a:t>
+              <a:t xml:space="preserve">4. Which equation in slope-intercept form is parallel to </a:t>
             </a:r>
             <a:r>
               <a:rPr lang="en-US" sz="1950" dirty="0" i="1">
@@ -20308,6 +20158,26 @@
                 <a:cs typeface="Cambria"/>
               </a:rPr>
               <a:t xml:space="preserve"> + 1</a:t>
+            </a:r>
+            <a:r>
+              <a:rPr lang="en-US" sz="1950" dirty="0">
+                <a:solidFill>
+                  <a:srgbClr val="16171D"/>
+                </a:solidFill>
+                <a:latin typeface="Segoe UI"/>
+                <a:cs typeface="Segoe UI"/>
+              </a:rPr>
+              <a:t xml:space="preserve"> and passes through </a:t>
+            </a:r>
+            <a:r>
+              <a:rPr lang="en-US" sz="1950" dirty="0">
+                <a:solidFill>
+                  <a:srgbClr val="16171D"/>
+                </a:solidFill>
+                <a:latin typeface="Cambria"/>
+                <a:cs typeface="Cambria"/>
+              </a:rPr>
+              <a:t xml:space="preserve">(1, 5)</a:t>
             </a:r>
             <a:r>
               <a:rPr lang="en-US" sz="1950" dirty="0">
@@ -20331,7 +20201,7 @@
         </p:nvSpPr>
         <p:spPr>
           <a:xfrm>
-            <a:off x="6362548" y="3432048"/>
+            <a:off x="6362548" y="4026408"/>
             <a:ext cx="3571326" cy="518922"/>
           </a:xfrm>
           <a:prstGeom prst="roundRect">
@@ -20405,7 +20275,7 @@
                 <a:latin typeface="Cambria"/>
                 <a:cs typeface="Cambria"/>
               </a:rPr>
-              <a:t xml:space="preserve"> − 5</a:t>
+              <a:t xml:space="preserve"> + 2</a:t>
             </a:r>
             <a:endParaRPr lang="en-US" sz="2325" dirty="0"/>
           </a:p>

--- a/Module 2 topic 2/t2-lesson1-transforming-linear-functions.pptx
+++ b/Module 2 topic 2/t2-lesson1-transforming-linear-functions.pptx
@@ -2720,7 +2720,7 @@
                 <a:latin typeface="Segoe UI"/>
                 <a:cs typeface="Segoe UI"/>
               </a:rPr>
-              <a:t xml:space="preserve">Day 1 · Activity 1.1 · Summary</a:t>
+              <a:t xml:space="preserve">Day 1 · Activity 1.1 · Summary · ★ Essential</a:t>
             </a:r>
             <a:endParaRPr lang="en-US" sz="1200" dirty="0"/>
           </a:p>
@@ -5236,7 +5236,7 @@
                 <a:latin typeface="Segoe UI"/>
                 <a:cs typeface="Segoe UI"/>
               </a:rPr>
-              <a:t xml:space="preserve">Day 2 · Activity 1.2 · Slopes of Parallel Lines · SE p. 275</a:t>
+              <a:t xml:space="preserve">Day 2 · Activity 1.2 · Slopes of Parallel Lines · SE p. 275 · ★ Essential</a:t>
             </a:r>
             <a:endParaRPr lang="en-US" sz="1200" dirty="0"/>
           </a:p>
@@ -7053,7 +7053,7 @@
                 <a:latin typeface="Segoe UI"/>
                 <a:cs typeface="Segoe UI"/>
               </a:rPr>
-              <a:t xml:space="preserve">Day 2 · Activity 1.2 · Questions 3–4 · SE p. 276</a:t>
+              <a:t xml:space="preserve">Day 2 · Activity 1.2 · Questions 3–4 · SE p. 276 · ★ Essential</a:t>
             </a:r>
             <a:endParaRPr lang="en-US" sz="1200" dirty="0"/>
           </a:p>
@@ -8310,7 +8310,7 @@
                 <a:latin typeface="Segoe UI"/>
                 <a:cs typeface="Segoe UI"/>
               </a:rPr>
-              <a:t xml:space="preserve">Day 2 · Activity 1.3 · Vertical Dilations of Functions · SE pp. 277–278</a:t>
+              <a:t xml:space="preserve">Day 2 · Activity 1.3 · Vertical Dilations of Functions · SE pp. 277–278 · ★ Essential</a:t>
             </a:r>
             <a:endParaRPr lang="en-US" sz="1200" dirty="0"/>
           </a:p>
@@ -13970,7 +13970,7 @@
                 <a:latin typeface="Segoe UI"/>
                 <a:cs typeface="Segoe UI"/>
               </a:rPr>
-              <a:t xml:space="preserve">Day 2 · Activity 1.3 · Definition · SE p. 279</a:t>
+              <a:t xml:space="preserve">Day 2 · Activity 1.3 · Definition · SE p. 279 · ★ Essential</a:t>
             </a:r>
             <a:endParaRPr lang="en-US" sz="1200" dirty="0"/>
           </a:p>
@@ -20807,7 +20807,7 @@
                 <a:latin typeface="Segoe UI"/>
                 <a:cs typeface="Segoe UI"/>
               </a:rPr>
-              <a:t xml:space="preserve">Day 3 · Activity 1.4 · Graphing Linear Transformations · SE pp. 280–281</a:t>
+              <a:t xml:space="preserve">Day 3 · Activity 1.4 · Graphing Linear Transformations · SE pp. 280–281 · ★ Essential</a:t>
             </a:r>
             <a:endParaRPr lang="en-US" sz="1200" dirty="0"/>
           </a:p>
@@ -24011,7 +24011,7 @@
                 <a:latin typeface="Segoe UI"/>
                 <a:cs typeface="Segoe UI"/>
               </a:rPr>
-              <a:t xml:space="preserve">Day 3 · Activity 1.4 · Question 2 · SE p. 281</a:t>
+              <a:t xml:space="preserve">Day 3 · Activity 1.4 · Question 2 · SE p. 281 · ★ Essential</a:t>
             </a:r>
             <a:endParaRPr lang="en-US" sz="1200" dirty="0"/>
           </a:p>
@@ -39209,7 +39209,7 @@
                 <a:latin typeface="Segoe UI"/>
                 <a:cs typeface="Segoe UI"/>
               </a:rPr>
-              <a:t xml:space="preserve">Day 1 · Getting Started · Returning to Transformation Station · SE p. 270</a:t>
+              <a:t xml:space="preserve">Day 1 · Getting Started · Returning to Transformation Station · SE p. 270 · ★ Essential</a:t>
             </a:r>
             <a:endParaRPr lang="en-US" sz="1200" dirty="0"/>
           </a:p>
@@ -41938,7 +41938,7 @@
                 <a:latin typeface="Segoe UI"/>
                 <a:cs typeface="Segoe UI"/>
               </a:rPr>
-              <a:t xml:space="preserve">Day 1 · Getting Started · Dilations · SE p. 271</a:t>
+              <a:t xml:space="preserve">Day 1 · Getting Started · Dilations · SE p. 271 · ★ Essential</a:t>
             </a:r>
             <a:endParaRPr lang="en-US" sz="1200" dirty="0"/>
           </a:p>
@@ -44551,7 +44551,7 @@
                 <a:latin typeface="Segoe UI"/>
                 <a:cs typeface="Segoe UI"/>
               </a:rPr>
-              <a:t xml:space="preserve">Day 1 · Activity 1.1 · Vertical Translations of Functions · SE p. 272</a:t>
+              <a:t xml:space="preserve">Day 1 · Activity 1.1 · Vertical Translations of Functions · SE p. 272 · ★ Essential</a:t>
             </a:r>
             <a:endParaRPr lang="en-US" sz="1200" dirty="0"/>
           </a:p>
@@ -50505,7 +50505,7 @@
                 <a:latin typeface="Segoe UI"/>
                 <a:cs typeface="Segoe UI"/>
               </a:rPr>
-              <a:t xml:space="preserve">Day 1 · Activity 1.1 · Definition · SE p. 273</a:t>
+              <a:t xml:space="preserve">Day 1 · Activity 1.1 · Definition · SE p. 273 · ★ Essential</a:t>
             </a:r>
             <a:endParaRPr lang="en-US" sz="1200" dirty="0"/>
           </a:p>
@@ -51564,7 +51564,7 @@
                 <a:latin typeface="Segoe UI"/>
                 <a:cs typeface="Segoe UI"/>
               </a:rPr>
-              <a:t xml:space="preserve">Day 1 · Activity 1.1 · Questions 5–6 · SE p. 274</a:t>
+              <a:t xml:space="preserve">Day 1 · Activity 1.1 · Questions 5–6 · SE p. 274 · ★ Essential</a:t>
             </a:r>
             <a:endParaRPr lang="en-US" sz="1200" dirty="0"/>
           </a:p>
